--- a/Органайзер загрузок.pptx
+++ b/Органайзер загрузок.pptx
@@ -1,14 +1,13 @@
 
 <file path=ppt/presentation.xml><?xml version="1.0" encoding="utf-8"?>
-<p:presentation xmlns:a="http://schemas.openxmlformats.org/drawingml/2006/main" xmlns:r="http://schemas.openxmlformats.org/officeDocument/2006/relationships" xmlns:p="http://schemas.openxmlformats.org/presentationml/2006/main" saveSubsetFonts="1">
+<p:presentation xmlns:a="http://schemas.openxmlformats.org/drawingml/2006/main" xmlns:r="http://schemas.openxmlformats.org/officeDocument/2006/relationships" xmlns:p="http://schemas.openxmlformats.org/presentationml/2006/main">
   <p:sldMasterIdLst>
     <p:sldMasterId id="2147483648" r:id="rId1"/>
   </p:sldMasterIdLst>
   <p:sldIdLst>
-    <p:sldId id="256" r:id="rId2"/>
-    <p:sldId id="257" r:id="rId3"/>
-    <p:sldId id="261" r:id="rId4"/>
-    <p:sldId id="258" r:id="rId5"/>
+    <p:sldId id="256" r:id="rId3"/>
+    <p:sldId id="257" r:id="rId4"/>
+    <p:sldId id="261" r:id="rId5"/>
     <p:sldId id="259" r:id="rId6"/>
     <p:sldId id="260" r:id="rId7"/>
   </p:sldIdLst>
@@ -109,11 +108,6 @@
       </a:defRPr>
     </a:lvl9pPr>
   </p:defaultTextStyle>
-  <p:extLst>
-    <p:ext uri="{EFAFB233-063F-42B5-8137-9DF3F51BA10A}">
-      <p15:sldGuideLst xmlns:p15="http://schemas.microsoft.com/office/powerpoint/2012/main"/>
-    </p:ext>
-  </p:extLst>
 </p:presentation>
 </file>
 
@@ -248,7 +242,6 @@
           <a:p>
             <a:fld id="{C0FB2DAF-47A4-4033-9207-470ECA6CAFBB}" type="datetimeFigureOut">
               <a:rPr lang="ru-RU" smtClean="0"/>
-              <a:t>08.04.2026</a:t>
             </a:fld>
             <a:endParaRPr lang="ru-RU"/>
           </a:p>
@@ -290,18 +283,12 @@
           <a:p>
             <a:fld id="{89B250E5-FBC7-41A2-99B4-5E46F230FD9D}" type="slidenum">
               <a:rPr lang="ru-RU" smtClean="0"/>
-              <a:t>‹#›</a:t>
             </a:fld>
             <a:endParaRPr lang="ru-RU"/>
           </a:p>
         </p:txBody>
       </p:sp>
     </p:spTree>
-    <p:extLst>
-      <p:ext uri="{BB962C8B-B14F-4D97-AF65-F5344CB8AC3E}">
-        <p14:creationId xmlns:p14="http://schemas.microsoft.com/office/powerpoint/2010/main" val="744306140"/>
-      </p:ext>
-    </p:extLst>
   </p:cSld>
   <p:clrMapOvr>
     <a:masterClrMapping/>
@@ -369,6 +356,7 @@
               <a:rPr lang="ru-RU" smtClean="0"/>
               <a:t>Образец текста</a:t>
             </a:r>
+            <a:endParaRPr lang="ru-RU" smtClean="0"/>
           </a:p>
           <a:p>
             <a:pPr lvl="1"/>
@@ -376,6 +364,7 @@
               <a:rPr lang="ru-RU" smtClean="0"/>
               <a:t>Второй уровень</a:t>
             </a:r>
+            <a:endParaRPr lang="ru-RU" smtClean="0"/>
           </a:p>
           <a:p>
             <a:pPr lvl="2"/>
@@ -383,6 +372,7 @@
               <a:rPr lang="ru-RU" smtClean="0"/>
               <a:t>Третий уровень</a:t>
             </a:r>
+            <a:endParaRPr lang="ru-RU" smtClean="0"/>
           </a:p>
           <a:p>
             <a:pPr lvl="3"/>
@@ -390,6 +380,7 @@
               <a:rPr lang="ru-RU" smtClean="0"/>
               <a:t>Четвертый уровень</a:t>
             </a:r>
+            <a:endParaRPr lang="ru-RU" smtClean="0"/>
           </a:p>
           <a:p>
             <a:pPr lvl="4"/>
@@ -418,7 +409,6 @@
           <a:p>
             <a:fld id="{C0FB2DAF-47A4-4033-9207-470ECA6CAFBB}" type="datetimeFigureOut">
               <a:rPr lang="ru-RU" smtClean="0"/>
-              <a:t>08.04.2026</a:t>
             </a:fld>
             <a:endParaRPr lang="ru-RU"/>
           </a:p>
@@ -460,18 +450,12 @@
           <a:p>
             <a:fld id="{89B250E5-FBC7-41A2-99B4-5E46F230FD9D}" type="slidenum">
               <a:rPr lang="ru-RU" smtClean="0"/>
-              <a:t>‹#›</a:t>
             </a:fld>
             <a:endParaRPr lang="ru-RU"/>
           </a:p>
         </p:txBody>
       </p:sp>
     </p:spTree>
-    <p:extLst>
-      <p:ext uri="{BB962C8B-B14F-4D97-AF65-F5344CB8AC3E}">
-        <p14:creationId xmlns:p14="http://schemas.microsoft.com/office/powerpoint/2010/main" val="977617078"/>
-      </p:ext>
-    </p:extLst>
   </p:cSld>
   <p:clrMapOvr>
     <a:masterClrMapping/>
@@ -549,6 +533,7 @@
               <a:rPr lang="ru-RU" smtClean="0"/>
               <a:t>Образец текста</a:t>
             </a:r>
+            <a:endParaRPr lang="ru-RU" smtClean="0"/>
           </a:p>
           <a:p>
             <a:pPr lvl="1"/>
@@ -556,6 +541,7 @@
               <a:rPr lang="ru-RU" smtClean="0"/>
               <a:t>Второй уровень</a:t>
             </a:r>
+            <a:endParaRPr lang="ru-RU" smtClean="0"/>
           </a:p>
           <a:p>
             <a:pPr lvl="2"/>
@@ -563,6 +549,7 @@
               <a:rPr lang="ru-RU" smtClean="0"/>
               <a:t>Третий уровень</a:t>
             </a:r>
+            <a:endParaRPr lang="ru-RU" smtClean="0"/>
           </a:p>
           <a:p>
             <a:pPr lvl="3"/>
@@ -570,6 +557,7 @@
               <a:rPr lang="ru-RU" smtClean="0"/>
               <a:t>Четвертый уровень</a:t>
             </a:r>
+            <a:endParaRPr lang="ru-RU" smtClean="0"/>
           </a:p>
           <a:p>
             <a:pPr lvl="4"/>
@@ -598,7 +586,6 @@
           <a:p>
             <a:fld id="{C0FB2DAF-47A4-4033-9207-470ECA6CAFBB}" type="datetimeFigureOut">
               <a:rPr lang="ru-RU" smtClean="0"/>
-              <a:t>08.04.2026</a:t>
             </a:fld>
             <a:endParaRPr lang="ru-RU"/>
           </a:p>
@@ -640,18 +627,12 @@
           <a:p>
             <a:fld id="{89B250E5-FBC7-41A2-99B4-5E46F230FD9D}" type="slidenum">
               <a:rPr lang="ru-RU" smtClean="0"/>
-              <a:t>‹#›</a:t>
             </a:fld>
             <a:endParaRPr lang="ru-RU"/>
           </a:p>
         </p:txBody>
       </p:sp>
     </p:spTree>
-    <p:extLst>
-      <p:ext uri="{BB962C8B-B14F-4D97-AF65-F5344CB8AC3E}">
-        <p14:creationId xmlns:p14="http://schemas.microsoft.com/office/powerpoint/2010/main" val="2727712593"/>
-      </p:ext>
-    </p:extLst>
   </p:cSld>
   <p:clrMapOvr>
     <a:masterClrMapping/>
@@ -719,6 +700,7 @@
               <a:rPr lang="ru-RU" smtClean="0"/>
               <a:t>Образец текста</a:t>
             </a:r>
+            <a:endParaRPr lang="ru-RU" smtClean="0"/>
           </a:p>
           <a:p>
             <a:pPr lvl="1"/>
@@ -726,6 +708,7 @@
               <a:rPr lang="ru-RU" smtClean="0"/>
               <a:t>Второй уровень</a:t>
             </a:r>
+            <a:endParaRPr lang="ru-RU" smtClean="0"/>
           </a:p>
           <a:p>
             <a:pPr lvl="2"/>
@@ -733,6 +716,7 @@
               <a:rPr lang="ru-RU" smtClean="0"/>
               <a:t>Третий уровень</a:t>
             </a:r>
+            <a:endParaRPr lang="ru-RU" smtClean="0"/>
           </a:p>
           <a:p>
             <a:pPr lvl="3"/>
@@ -740,6 +724,7 @@
               <a:rPr lang="ru-RU" smtClean="0"/>
               <a:t>Четвертый уровень</a:t>
             </a:r>
+            <a:endParaRPr lang="ru-RU" smtClean="0"/>
           </a:p>
           <a:p>
             <a:pPr lvl="4"/>
@@ -768,7 +753,6 @@
           <a:p>
             <a:fld id="{C0FB2DAF-47A4-4033-9207-470ECA6CAFBB}" type="datetimeFigureOut">
               <a:rPr lang="ru-RU" smtClean="0"/>
-              <a:t>08.04.2026</a:t>
             </a:fld>
             <a:endParaRPr lang="ru-RU"/>
           </a:p>
@@ -810,18 +794,12 @@
           <a:p>
             <a:fld id="{89B250E5-FBC7-41A2-99B4-5E46F230FD9D}" type="slidenum">
               <a:rPr lang="ru-RU" smtClean="0"/>
-              <a:t>‹#›</a:t>
             </a:fld>
             <a:endParaRPr lang="ru-RU"/>
           </a:p>
         </p:txBody>
       </p:sp>
     </p:spTree>
-    <p:extLst>
-      <p:ext uri="{BB962C8B-B14F-4D97-AF65-F5344CB8AC3E}">
-        <p14:creationId xmlns:p14="http://schemas.microsoft.com/office/powerpoint/2010/main" val="4030927148"/>
-      </p:ext>
-    </p:extLst>
   </p:cSld>
   <p:clrMapOvr>
     <a:masterClrMapping/>
@@ -994,6 +972,7 @@
               <a:rPr lang="ru-RU" smtClean="0"/>
               <a:t>Образец текста</a:t>
             </a:r>
+            <a:endParaRPr lang="ru-RU" smtClean="0"/>
           </a:p>
         </p:txBody>
       </p:sp>
@@ -1014,7 +993,6 @@
           <a:p>
             <a:fld id="{C0FB2DAF-47A4-4033-9207-470ECA6CAFBB}" type="datetimeFigureOut">
               <a:rPr lang="ru-RU" smtClean="0"/>
-              <a:t>08.04.2026</a:t>
             </a:fld>
             <a:endParaRPr lang="ru-RU"/>
           </a:p>
@@ -1056,18 +1034,12 @@
           <a:p>
             <a:fld id="{89B250E5-FBC7-41A2-99B4-5E46F230FD9D}" type="slidenum">
               <a:rPr lang="ru-RU" smtClean="0"/>
-              <a:t>‹#›</a:t>
             </a:fld>
             <a:endParaRPr lang="ru-RU"/>
           </a:p>
         </p:txBody>
       </p:sp>
     </p:spTree>
-    <p:extLst>
-      <p:ext uri="{BB962C8B-B14F-4D97-AF65-F5344CB8AC3E}">
-        <p14:creationId xmlns:p14="http://schemas.microsoft.com/office/powerpoint/2010/main" val="16683430"/>
-      </p:ext>
-    </p:extLst>
   </p:cSld>
   <p:clrMapOvr>
     <a:masterClrMapping/>
@@ -1140,6 +1112,7 @@
               <a:rPr lang="ru-RU" smtClean="0"/>
               <a:t>Образец текста</a:t>
             </a:r>
+            <a:endParaRPr lang="ru-RU" smtClean="0"/>
           </a:p>
           <a:p>
             <a:pPr lvl="1"/>
@@ -1147,6 +1120,7 @@
               <a:rPr lang="ru-RU" smtClean="0"/>
               <a:t>Второй уровень</a:t>
             </a:r>
+            <a:endParaRPr lang="ru-RU" smtClean="0"/>
           </a:p>
           <a:p>
             <a:pPr lvl="2"/>
@@ -1154,6 +1128,7 @@
               <a:rPr lang="ru-RU" smtClean="0"/>
               <a:t>Третий уровень</a:t>
             </a:r>
+            <a:endParaRPr lang="ru-RU" smtClean="0"/>
           </a:p>
           <a:p>
             <a:pPr lvl="3"/>
@@ -1161,6 +1136,7 @@
               <a:rPr lang="ru-RU" smtClean="0"/>
               <a:t>Четвертый уровень</a:t>
             </a:r>
+            <a:endParaRPr lang="ru-RU" smtClean="0"/>
           </a:p>
           <a:p>
             <a:pPr lvl="4"/>
@@ -1197,6 +1173,7 @@
               <a:rPr lang="ru-RU" smtClean="0"/>
               <a:t>Образец текста</a:t>
             </a:r>
+            <a:endParaRPr lang="ru-RU" smtClean="0"/>
           </a:p>
           <a:p>
             <a:pPr lvl="1"/>
@@ -1204,6 +1181,7 @@
               <a:rPr lang="ru-RU" smtClean="0"/>
               <a:t>Второй уровень</a:t>
             </a:r>
+            <a:endParaRPr lang="ru-RU" smtClean="0"/>
           </a:p>
           <a:p>
             <a:pPr lvl="2"/>
@@ -1211,6 +1189,7 @@
               <a:rPr lang="ru-RU" smtClean="0"/>
               <a:t>Третий уровень</a:t>
             </a:r>
+            <a:endParaRPr lang="ru-RU" smtClean="0"/>
           </a:p>
           <a:p>
             <a:pPr lvl="3"/>
@@ -1218,6 +1197,7 @@
               <a:rPr lang="ru-RU" smtClean="0"/>
               <a:t>Четвертый уровень</a:t>
             </a:r>
+            <a:endParaRPr lang="ru-RU" smtClean="0"/>
           </a:p>
           <a:p>
             <a:pPr lvl="4"/>
@@ -1246,7 +1226,6 @@
           <a:p>
             <a:fld id="{C0FB2DAF-47A4-4033-9207-470ECA6CAFBB}" type="datetimeFigureOut">
               <a:rPr lang="ru-RU" smtClean="0"/>
-              <a:t>08.04.2026</a:t>
             </a:fld>
             <a:endParaRPr lang="ru-RU"/>
           </a:p>
@@ -1288,18 +1267,12 @@
           <a:p>
             <a:fld id="{89B250E5-FBC7-41A2-99B4-5E46F230FD9D}" type="slidenum">
               <a:rPr lang="ru-RU" smtClean="0"/>
-              <a:t>‹#›</a:t>
             </a:fld>
             <a:endParaRPr lang="ru-RU"/>
           </a:p>
         </p:txBody>
       </p:sp>
     </p:spTree>
-    <p:extLst>
-      <p:ext uri="{BB962C8B-B14F-4D97-AF65-F5344CB8AC3E}">
-        <p14:creationId xmlns:p14="http://schemas.microsoft.com/office/powerpoint/2010/main" val="3700444915"/>
-      </p:ext>
-    </p:extLst>
   </p:cSld>
   <p:clrMapOvr>
     <a:masterClrMapping/>
@@ -1414,6 +1387,7 @@
               <a:rPr lang="ru-RU" smtClean="0"/>
               <a:t>Образец текста</a:t>
             </a:r>
+            <a:endParaRPr lang="ru-RU" smtClean="0"/>
           </a:p>
         </p:txBody>
       </p:sp>
@@ -1442,6 +1416,7 @@
               <a:rPr lang="ru-RU" smtClean="0"/>
               <a:t>Образец текста</a:t>
             </a:r>
+            <a:endParaRPr lang="ru-RU" smtClean="0"/>
           </a:p>
           <a:p>
             <a:pPr lvl="1"/>
@@ -1449,6 +1424,7 @@
               <a:rPr lang="ru-RU" smtClean="0"/>
               <a:t>Второй уровень</a:t>
             </a:r>
+            <a:endParaRPr lang="ru-RU" smtClean="0"/>
           </a:p>
           <a:p>
             <a:pPr lvl="2"/>
@@ -1456,6 +1432,7 @@
               <a:rPr lang="ru-RU" smtClean="0"/>
               <a:t>Третий уровень</a:t>
             </a:r>
+            <a:endParaRPr lang="ru-RU" smtClean="0"/>
           </a:p>
           <a:p>
             <a:pPr lvl="3"/>
@@ -1463,6 +1440,7 @@
               <a:rPr lang="ru-RU" smtClean="0"/>
               <a:t>Четвертый уровень</a:t>
             </a:r>
+            <a:endParaRPr lang="ru-RU" smtClean="0"/>
           </a:p>
           <a:p>
             <a:pPr lvl="4"/>
@@ -1536,6 +1514,7 @@
               <a:rPr lang="ru-RU" smtClean="0"/>
               <a:t>Образец текста</a:t>
             </a:r>
+            <a:endParaRPr lang="ru-RU" smtClean="0"/>
           </a:p>
         </p:txBody>
       </p:sp>
@@ -1564,6 +1543,7 @@
               <a:rPr lang="ru-RU" smtClean="0"/>
               <a:t>Образец текста</a:t>
             </a:r>
+            <a:endParaRPr lang="ru-RU" smtClean="0"/>
           </a:p>
           <a:p>
             <a:pPr lvl="1"/>
@@ -1571,6 +1551,7 @@
               <a:rPr lang="ru-RU" smtClean="0"/>
               <a:t>Второй уровень</a:t>
             </a:r>
+            <a:endParaRPr lang="ru-RU" smtClean="0"/>
           </a:p>
           <a:p>
             <a:pPr lvl="2"/>
@@ -1578,6 +1559,7 @@
               <a:rPr lang="ru-RU" smtClean="0"/>
               <a:t>Третий уровень</a:t>
             </a:r>
+            <a:endParaRPr lang="ru-RU" smtClean="0"/>
           </a:p>
           <a:p>
             <a:pPr lvl="3"/>
@@ -1585,6 +1567,7 @@
               <a:rPr lang="ru-RU" smtClean="0"/>
               <a:t>Четвертый уровень</a:t>
             </a:r>
+            <a:endParaRPr lang="ru-RU" smtClean="0"/>
           </a:p>
           <a:p>
             <a:pPr lvl="4"/>
@@ -1613,7 +1596,6 @@
           <a:p>
             <a:fld id="{C0FB2DAF-47A4-4033-9207-470ECA6CAFBB}" type="datetimeFigureOut">
               <a:rPr lang="ru-RU" smtClean="0"/>
-              <a:t>08.04.2026</a:t>
             </a:fld>
             <a:endParaRPr lang="ru-RU"/>
           </a:p>
@@ -1655,18 +1637,12 @@
           <a:p>
             <a:fld id="{89B250E5-FBC7-41A2-99B4-5E46F230FD9D}" type="slidenum">
               <a:rPr lang="ru-RU" smtClean="0"/>
-              <a:t>‹#›</a:t>
             </a:fld>
             <a:endParaRPr lang="ru-RU"/>
           </a:p>
         </p:txBody>
       </p:sp>
     </p:spTree>
-    <p:extLst>
-      <p:ext uri="{BB962C8B-B14F-4D97-AF65-F5344CB8AC3E}">
-        <p14:creationId xmlns:p14="http://schemas.microsoft.com/office/powerpoint/2010/main" val="186505805"/>
-      </p:ext>
-    </p:extLst>
   </p:cSld>
   <p:clrMapOvr>
     <a:masterClrMapping/>
@@ -1731,7 +1707,6 @@
           <a:p>
             <a:fld id="{C0FB2DAF-47A4-4033-9207-470ECA6CAFBB}" type="datetimeFigureOut">
               <a:rPr lang="ru-RU" smtClean="0"/>
-              <a:t>08.04.2026</a:t>
             </a:fld>
             <a:endParaRPr lang="ru-RU"/>
           </a:p>
@@ -1773,18 +1748,12 @@
           <a:p>
             <a:fld id="{89B250E5-FBC7-41A2-99B4-5E46F230FD9D}" type="slidenum">
               <a:rPr lang="ru-RU" smtClean="0"/>
-              <a:t>‹#›</a:t>
             </a:fld>
             <a:endParaRPr lang="ru-RU"/>
           </a:p>
         </p:txBody>
       </p:sp>
     </p:spTree>
-    <p:extLst>
-      <p:ext uri="{BB962C8B-B14F-4D97-AF65-F5344CB8AC3E}">
-        <p14:creationId xmlns:p14="http://schemas.microsoft.com/office/powerpoint/2010/main" val="3590693707"/>
-      </p:ext>
-    </p:extLst>
   </p:cSld>
   <p:clrMapOvr>
     <a:masterClrMapping/>
@@ -1826,7 +1795,6 @@
           <a:p>
             <a:fld id="{C0FB2DAF-47A4-4033-9207-470ECA6CAFBB}" type="datetimeFigureOut">
               <a:rPr lang="ru-RU" smtClean="0"/>
-              <a:t>08.04.2026</a:t>
             </a:fld>
             <a:endParaRPr lang="ru-RU"/>
           </a:p>
@@ -1868,18 +1836,12 @@
           <a:p>
             <a:fld id="{89B250E5-FBC7-41A2-99B4-5E46F230FD9D}" type="slidenum">
               <a:rPr lang="ru-RU" smtClean="0"/>
-              <a:t>‹#›</a:t>
             </a:fld>
             <a:endParaRPr lang="ru-RU"/>
           </a:p>
         </p:txBody>
       </p:sp>
     </p:spTree>
-    <p:extLst>
-      <p:ext uri="{BB962C8B-B14F-4D97-AF65-F5344CB8AC3E}">
-        <p14:creationId xmlns:p14="http://schemas.microsoft.com/office/powerpoint/2010/main" val="3011623654"/>
-      </p:ext>
-    </p:extLst>
   </p:cSld>
   <p:clrMapOvr>
     <a:masterClrMapping/>
@@ -1989,6 +1951,7 @@
               <a:rPr lang="ru-RU" smtClean="0"/>
               <a:t>Образец текста</a:t>
             </a:r>
+            <a:endParaRPr lang="ru-RU" smtClean="0"/>
           </a:p>
           <a:p>
             <a:pPr lvl="1"/>
@@ -1996,6 +1959,7 @@
               <a:rPr lang="ru-RU" smtClean="0"/>
               <a:t>Второй уровень</a:t>
             </a:r>
+            <a:endParaRPr lang="ru-RU" smtClean="0"/>
           </a:p>
           <a:p>
             <a:pPr lvl="2"/>
@@ -2003,6 +1967,7 @@
               <a:rPr lang="ru-RU" smtClean="0"/>
               <a:t>Третий уровень</a:t>
             </a:r>
+            <a:endParaRPr lang="ru-RU" smtClean="0"/>
           </a:p>
           <a:p>
             <a:pPr lvl="3"/>
@@ -2010,6 +1975,7 @@
               <a:rPr lang="ru-RU" smtClean="0"/>
               <a:t>Четвертый уровень</a:t>
             </a:r>
+            <a:endParaRPr lang="ru-RU" smtClean="0"/>
           </a:p>
           <a:p>
             <a:pPr lvl="4"/>
@@ -2083,6 +2049,7 @@
               <a:rPr lang="ru-RU" smtClean="0"/>
               <a:t>Образец текста</a:t>
             </a:r>
+            <a:endParaRPr lang="ru-RU" smtClean="0"/>
           </a:p>
         </p:txBody>
       </p:sp>
@@ -2103,7 +2070,6 @@
           <a:p>
             <a:fld id="{C0FB2DAF-47A4-4033-9207-470ECA6CAFBB}" type="datetimeFigureOut">
               <a:rPr lang="ru-RU" smtClean="0"/>
-              <a:t>08.04.2026</a:t>
             </a:fld>
             <a:endParaRPr lang="ru-RU"/>
           </a:p>
@@ -2145,18 +2111,12 @@
           <a:p>
             <a:fld id="{89B250E5-FBC7-41A2-99B4-5E46F230FD9D}" type="slidenum">
               <a:rPr lang="ru-RU" smtClean="0"/>
-              <a:t>‹#›</a:t>
             </a:fld>
             <a:endParaRPr lang="ru-RU"/>
           </a:p>
         </p:txBody>
       </p:sp>
     </p:spTree>
-    <p:extLst>
-      <p:ext uri="{BB962C8B-B14F-4D97-AF65-F5344CB8AC3E}">
-        <p14:creationId xmlns:p14="http://schemas.microsoft.com/office/powerpoint/2010/main" val="1777360433"/>
-      </p:ext>
-    </p:extLst>
   </p:cSld>
   <p:clrMapOvr>
     <a:masterClrMapping/>
@@ -2336,6 +2296,7 @@
               <a:rPr lang="ru-RU" smtClean="0"/>
               <a:t>Образец текста</a:t>
             </a:r>
+            <a:endParaRPr lang="ru-RU" smtClean="0"/>
           </a:p>
         </p:txBody>
       </p:sp>
@@ -2356,7 +2317,6 @@
           <a:p>
             <a:fld id="{C0FB2DAF-47A4-4033-9207-470ECA6CAFBB}" type="datetimeFigureOut">
               <a:rPr lang="ru-RU" smtClean="0"/>
-              <a:t>08.04.2026</a:t>
             </a:fld>
             <a:endParaRPr lang="ru-RU"/>
           </a:p>
@@ -2398,18 +2358,12 @@
           <a:p>
             <a:fld id="{89B250E5-FBC7-41A2-99B4-5E46F230FD9D}" type="slidenum">
               <a:rPr lang="ru-RU" smtClean="0"/>
-              <a:t>‹#›</a:t>
             </a:fld>
             <a:endParaRPr lang="ru-RU"/>
           </a:p>
         </p:txBody>
       </p:sp>
     </p:spTree>
-    <p:extLst>
-      <p:ext uri="{BB962C8B-B14F-4D97-AF65-F5344CB8AC3E}">
-        <p14:creationId xmlns:p14="http://schemas.microsoft.com/office/powerpoint/2010/main" val="1825115899"/>
-      </p:ext>
-    </p:extLst>
   </p:cSld>
   <p:clrMapOvr>
     <a:masterClrMapping/>
@@ -2502,6 +2456,7 @@
               <a:rPr lang="ru-RU" smtClean="0"/>
               <a:t>Образец текста</a:t>
             </a:r>
+            <a:endParaRPr lang="ru-RU" smtClean="0"/>
           </a:p>
           <a:p>
             <a:pPr lvl="1"/>
@@ -2509,6 +2464,7 @@
               <a:rPr lang="ru-RU" smtClean="0"/>
               <a:t>Второй уровень</a:t>
             </a:r>
+            <a:endParaRPr lang="ru-RU" smtClean="0"/>
           </a:p>
           <a:p>
             <a:pPr lvl="2"/>
@@ -2516,6 +2472,7 @@
               <a:rPr lang="ru-RU" smtClean="0"/>
               <a:t>Третий уровень</a:t>
             </a:r>
+            <a:endParaRPr lang="ru-RU" smtClean="0"/>
           </a:p>
           <a:p>
             <a:pPr lvl="3"/>
@@ -2523,6 +2480,7 @@
               <a:rPr lang="ru-RU" smtClean="0"/>
               <a:t>Четвертый уровень</a:t>
             </a:r>
+            <a:endParaRPr lang="ru-RU" smtClean="0"/>
           </a:p>
           <a:p>
             <a:pPr lvl="4"/>
@@ -2569,7 +2527,6 @@
           <a:p>
             <a:fld id="{C0FB2DAF-47A4-4033-9207-470ECA6CAFBB}" type="datetimeFigureOut">
               <a:rPr lang="ru-RU" smtClean="0"/>
-              <a:t>08.04.2026</a:t>
             </a:fld>
             <a:endParaRPr lang="ru-RU"/>
           </a:p>
@@ -2647,18 +2604,12 @@
           <a:p>
             <a:fld id="{89B250E5-FBC7-41A2-99B4-5E46F230FD9D}" type="slidenum">
               <a:rPr lang="ru-RU" smtClean="0"/>
-              <a:t>‹#›</a:t>
             </a:fld>
             <a:endParaRPr lang="ru-RU"/>
           </a:p>
         </p:txBody>
       </p:sp>
     </p:spTree>
-    <p:extLst>
-      <p:ext uri="{BB962C8B-B14F-4D97-AF65-F5344CB8AC3E}">
-        <p14:creationId xmlns:p14="http://schemas.microsoft.com/office/powerpoint/2010/main" val="2311743866"/>
-      </p:ext>
-    </p:extLst>
   </p:cSld>
   <p:clrMap bg1="lt1" tx1="dk1" bg2="lt2" tx2="dk2" accent1="accent1" accent2="accent2" accent3="accent3" accent4="accent4" accent5="accent5" accent6="accent6" hlink="hlink" folHlink="folHlink"/>
   <p:sldLayoutIdLst>
@@ -3002,6 +2953,7 @@
               <a:rPr lang="ru-RU" dirty="0"/>
               <a:t>загрузок</a:t>
             </a:r>
+            <a:endParaRPr lang="ru-RU" dirty="0"/>
           </a:p>
         </p:txBody>
       </p:sp>
@@ -3112,11 +3064,6 @@
         </p:txBody>
       </p:sp>
     </p:spTree>
-    <p:extLst>
-      <p:ext uri="{BB962C8B-B14F-4D97-AF65-F5344CB8AC3E}">
-        <p14:creationId xmlns:p14="http://schemas.microsoft.com/office/powerpoint/2010/main" val="4274102168"/>
-      </p:ext>
-    </p:extLst>
   </p:cSld>
   <p:clrMapOvr>
     <a:masterClrMapping/>
@@ -3352,7 +3299,7 @@
           <p:nvPr/>
         </p:nvPicPr>
         <p:blipFill>
-          <a:blip r:embed="rId2"/>
+          <a:blip r:embed="rId1"/>
           <a:stretch>
             <a:fillRect/>
           </a:stretch>
@@ -3368,11 +3315,6 @@
         </p:spPr>
       </p:pic>
     </p:spTree>
-    <p:extLst>
-      <p:ext uri="{BB962C8B-B14F-4D97-AF65-F5344CB8AC3E}">
-        <p14:creationId xmlns:p14="http://schemas.microsoft.com/office/powerpoint/2010/main" val="2625213798"/>
-      </p:ext>
-    </p:extLst>
   </p:cSld>
   <p:clrMapOvr>
     <a:masterClrMapping/>
@@ -3464,12 +3406,14 @@
               <a:rPr lang="ru-RU" dirty="0" smtClean="0"/>
               <a:t>Сортирование файлов по их нему расширению</a:t>
             </a:r>
+            <a:endParaRPr lang="ru-RU" dirty="0" smtClean="0"/>
           </a:p>
           <a:p>
             <a:r>
               <a:rPr lang="ru-RU" dirty="0" smtClean="0"/>
               <a:t>Может показать что он отсортировал и куда если боитесь не найти отсортированный файл</a:t>
             </a:r>
+            <a:endParaRPr lang="ru-RU" dirty="0" smtClean="0"/>
           </a:p>
           <a:p>
             <a:r>
@@ -3507,6 +3451,7 @@
               <a:rPr lang="ru-RU" sz="2400" dirty="0" smtClean="0"/>
               <a:t> </a:t>
             </a:r>
+            <a:endParaRPr lang="ru-RU" sz="2400" dirty="0" smtClean="0"/>
           </a:p>
           <a:p>
             <a:pPr algn="ctr"/>
@@ -3517,9 +3462,7 @@
       <p:sp>
         <p:nvSpPr>
           <p:cNvPr id="5" name="Подзаголовок 2"/>
-          <p:cNvSpPr txBox="1">
-            <a:spLocks/>
-          </p:cNvSpPr>
+          <p:cNvSpPr txBox="1"/>
           <p:nvPr/>
         </p:nvSpPr>
         <p:spPr>
@@ -3719,6 +3662,7 @@
               <a:rPr lang="ru-RU" dirty="0" smtClean="0"/>
               <a:t>отсортировывать</a:t>
             </a:r>
+            <a:endParaRPr lang="ru-RU" dirty="0" smtClean="0"/>
           </a:p>
           <a:p>
             <a:r>
@@ -3733,15 +3677,11 @@
               <a:rPr lang="ru-RU" dirty="0" smtClean="0"/>
               <a:t> тогда файл сортируется в Документы вместо Кода)</a:t>
             </a:r>
+            <a:endParaRPr lang="ru-RU" dirty="0" smtClean="0"/>
           </a:p>
         </p:txBody>
       </p:sp>
     </p:spTree>
-    <p:extLst>
-      <p:ext uri="{BB962C8B-B14F-4D97-AF65-F5344CB8AC3E}">
-        <p14:creationId xmlns:p14="http://schemas.microsoft.com/office/powerpoint/2010/main" val="2782141235"/>
-      </p:ext>
-    </p:extLst>
   </p:cSld>
   <p:clrMapOvr>
     <a:masterClrMapping/>
@@ -3776,14 +3716,19 @@
             <p:ph type="title"/>
           </p:nvPr>
         </p:nvSpPr>
-        <p:spPr/>
+        <p:spPr>
+          <a:xfrm>
+            <a:off x="2568633" y="1"/>
+            <a:ext cx="7373390" cy="964276"/>
+          </a:xfrm>
+        </p:spPr>
         <p:txBody>
           <a:bodyPr/>
           <a:lstStyle/>
           <a:p>
             <a:r>
               <a:rPr lang="ru-RU" dirty="0" smtClean="0"/>
-              <a:t>Временный слайд для меня тупого</a:t>
+              <a:t>Продажа и целевая аудитория</a:t>
             </a:r>
             <a:endParaRPr lang="ru-RU" dirty="0"/>
           </a:p>
@@ -3799,31 +3744,40 @@
             <p:ph idx="1"/>
           </p:nvPr>
         </p:nvSpPr>
-        <p:spPr/>
-        <p:txBody>
-          <a:bodyPr/>
-          <a:lstStyle/>
-          <a:p>
-            <a:pPr marL="0" indent="0">
-              <a:buNone/>
-            </a:pPr>
+        <p:spPr>
+          <a:xfrm>
+            <a:off x="804950" y="1675996"/>
+            <a:ext cx="10515600" cy="4351338"/>
+          </a:xfrm>
+        </p:spPr>
+        <p:txBody>
+          <a:bodyPr/>
+          <a:lstStyle/>
+          <a:p>
             <a:r>
               <a:rPr lang="ru-RU" dirty="0" smtClean="0"/>
-              <a:t> </a:t>
-            </a:r>
-            <a:r>
-              <a:rPr lang="ru-RU" dirty="0"/>
-              <a:t>Где ? Где вы собираетесь реализовывать и продавать ваше изделие?4 Когда ? Будет ли сезонность выпуска продуктов? Когда вы сможете продавать ваш продукт? Ситуация которая приведёт к покупке ?5 Кто? Кто будет покупать? Целевая аудитория ?</a:t>
-            </a:r>
+              <a:t>Мой проект будет полезен в любое время так как он может помочь с сортировкой файлов независимо в какое время он был использован.</a:t>
+            </a:r>
+            <a:endParaRPr lang="ru-RU" dirty="0" smtClean="0"/>
+          </a:p>
+          <a:p>
+            <a:r>
+              <a:rPr lang="ru-RU" dirty="0" smtClean="0"/>
+              <a:t>Целевая аудитор</a:t>
+            </a:r>
+            <a:r>
+              <a:rPr lang="en-US" dirty="0" smtClean="0"/>
+              <a:t>:</a:t>
+            </a:r>
+            <a:r>
+              <a:rPr lang="ru-RU" dirty="0" smtClean="0"/>
+              <a:t> Обычные пользователи, образовательные учреждения, программисты, компании. </a:t>
+            </a:r>
+            <a:endParaRPr lang="ru-RU" dirty="0"/>
           </a:p>
         </p:txBody>
       </p:sp>
     </p:spTree>
-    <p:extLst>
-      <p:ext uri="{BB962C8B-B14F-4D97-AF65-F5344CB8AC3E}">
-        <p14:creationId xmlns:p14="http://schemas.microsoft.com/office/powerpoint/2010/main" val="1676013571"/>
-      </p:ext>
-    </p:extLst>
   </p:cSld>
   <p:clrMapOvr>
     <a:masterClrMapping/>
@@ -3860,106 +3814,6 @@
         </p:nvSpPr>
         <p:spPr>
           <a:xfrm>
-            <a:off x="2568633" y="1"/>
-            <a:ext cx="7373390" cy="964276"/>
-          </a:xfrm>
-        </p:spPr>
-        <p:txBody>
-          <a:bodyPr/>
-          <a:lstStyle/>
-          <a:p>
-            <a:r>
-              <a:rPr lang="ru-RU" dirty="0" smtClean="0"/>
-              <a:t>Продажа и целевая аудитория</a:t>
-            </a:r>
-            <a:endParaRPr lang="ru-RU" dirty="0"/>
-          </a:p>
-        </p:txBody>
-      </p:sp>
-      <p:sp>
-        <p:nvSpPr>
-          <p:cNvPr id="3" name="Объект 2"/>
-          <p:cNvSpPr>
-            <a:spLocks noGrp="1"/>
-          </p:cNvSpPr>
-          <p:nvPr>
-            <p:ph idx="1"/>
-          </p:nvPr>
-        </p:nvSpPr>
-        <p:spPr>
-          <a:xfrm>
-            <a:off x="804950" y="1675996"/>
-            <a:ext cx="10515600" cy="4351338"/>
-          </a:xfrm>
-        </p:spPr>
-        <p:txBody>
-          <a:bodyPr/>
-          <a:lstStyle/>
-          <a:p>
-            <a:r>
-              <a:rPr lang="ru-RU" dirty="0" smtClean="0"/>
-              <a:t>Мой проект будет полезен в любое время так как он может помочь с сортировкой файлов независимо в какое время он был использован.</a:t>
-            </a:r>
-          </a:p>
-          <a:p>
-            <a:r>
-              <a:rPr lang="ru-RU" dirty="0" smtClean="0"/>
-              <a:t>Целевая аудитор</a:t>
-            </a:r>
-            <a:r>
-              <a:rPr lang="en-US" dirty="0" smtClean="0"/>
-              <a:t>:</a:t>
-            </a:r>
-            <a:r>
-              <a:rPr lang="ru-RU" dirty="0" smtClean="0"/>
-              <a:t> Обычные пользователи, образовательные учреждения, программисты, компании. </a:t>
-            </a:r>
-            <a:endParaRPr lang="ru-RU" dirty="0"/>
-          </a:p>
-        </p:txBody>
-      </p:sp>
-    </p:spTree>
-    <p:extLst>
-      <p:ext uri="{BB962C8B-B14F-4D97-AF65-F5344CB8AC3E}">
-        <p14:creationId xmlns:p14="http://schemas.microsoft.com/office/powerpoint/2010/main" val="3348395481"/>
-      </p:ext>
-    </p:extLst>
-  </p:cSld>
-  <p:clrMapOvr>
-    <a:masterClrMapping/>
-  </p:clrMapOvr>
-</p:sld>
-</file>
-
-<file path=ppt/slides/slide6.xml><?xml version="1.0" encoding="utf-8"?>
-<p:sld xmlns:a="http://schemas.openxmlformats.org/drawingml/2006/main" xmlns:r="http://schemas.openxmlformats.org/officeDocument/2006/relationships" xmlns:p="http://schemas.openxmlformats.org/presentationml/2006/main">
-  <p:cSld>
-    <p:spTree>
-      <p:nvGrpSpPr>
-        <p:cNvPr id="1" name=""/>
-        <p:cNvGrpSpPr/>
-        <p:nvPr/>
-      </p:nvGrpSpPr>
-      <p:grpSpPr>
-        <a:xfrm>
-          <a:off x="0" y="0"/>
-          <a:ext cx="0" cy="0"/>
-          <a:chOff x="0" y="0"/>
-          <a:chExt cx="0" cy="0"/>
-        </a:xfrm>
-      </p:grpSpPr>
-      <p:sp>
-        <p:nvSpPr>
-          <p:cNvPr id="2" name="Заголовок 1"/>
-          <p:cNvSpPr>
-            <a:spLocks noGrp="1"/>
-          </p:cNvSpPr>
-          <p:nvPr>
-            <p:ph type="title"/>
-          </p:nvPr>
-        </p:nvSpPr>
-        <p:spPr>
-          <a:xfrm>
             <a:off x="3283526" y="2185612"/>
             <a:ext cx="5569529" cy="1325563"/>
           </a:xfrm>
@@ -3977,11 +3831,6 @@
         </p:txBody>
       </p:sp>
     </p:spTree>
-    <p:extLst>
-      <p:ext uri="{BB962C8B-B14F-4D97-AF65-F5344CB8AC3E}">
-        <p14:creationId xmlns:p14="http://schemas.microsoft.com/office/powerpoint/2010/main" val="1719183844"/>
-      </p:ext>
-    </p:extLst>
   </p:cSld>
   <p:clrMapOvr>
     <a:masterClrMapping/>
@@ -4032,7 +3881,7 @@
     </a:clrScheme>
     <a:fontScheme name="Стандартная">
       <a:majorFont>
-        <a:latin typeface="Calibri Light" panose="020F0302020204030204"/>
+        <a:latin typeface="Calibri Light"/>
         <a:ea typeface=""/>
         <a:cs typeface=""/>
         <a:font script="Jpan" typeface="游ゴシック Light"/>
@@ -4067,7 +3916,7 @@
         <a:font script="Geor" typeface="Sylfaen"/>
       </a:majorFont>
       <a:minorFont>
-        <a:latin typeface="Calibri" panose="020F0502020204030204"/>
+        <a:latin typeface="Calibri"/>
         <a:ea typeface=""/>
         <a:cs typeface=""/>
         <a:font script="Jpan" typeface="游ゴシック"/>
@@ -4240,8 +4089,6 @@
       </a:bgFillStyleLst>
     </a:fmtScheme>
   </a:themeElements>
-  <a:objectDefaults/>
-  <a:extraClrSchemeLst/>
   <a:extLst>
     <a:ext uri="{05A4C25C-085E-4340-85A3-A5531E510DB2}">
       <thm15:themeFamily xmlns:thm15="http://schemas.microsoft.com/office/thememl/2012/main" name="Office Theme" id="{62F939B6-93AF-4DB8-9C6B-D6C7DFDC589F}" vid="{4A3C46E8-61CC-4603-A589-7422A47A8E4A}"/>
